--- a/songs/song-04/song.pptx
+++ b/songs/song-04/song.pptx
@@ -5,14 +5,14 @@
     <p:sldMasterId id="2147483695" r:id="rId1"/>
   </p:sldMasterIdLst>
   <p:sldIdLst>
-    <p:sldId id="256" r:id="rId56"/>
-    <p:sldId id="257" r:id="rId57"/>
-    <p:sldId id="258" r:id="rId58"/>
-    <p:sldId id="259" r:id="rId59"/>
-    <p:sldId id="260" r:id="rId60"/>
-    <p:sldId id="261" r:id="rId61"/>
-    <p:sldId id="262" r:id="rId62"/>
-    <p:sldId id="263" r:id="rId63"/>
+    <p:sldId id="256" r:id="rId2"/>
+    <p:sldId id="257" r:id="rId3"/>
+    <p:sldId id="258" r:id="rId4"/>
+    <p:sldId id="259" r:id="rId5"/>
+    <p:sldId id="260" r:id="rId6"/>
+    <p:sldId id="261" r:id="rId7"/>
+    <p:sldId id="262" r:id="rId8"/>
+    <p:sldId id="263" r:id="rId9"/>
   </p:sldIdLst>
   <p:sldSz cx="12192000" cy="6858000"/>
   <p:notesSz cx="6858000" cy="9144000"/>
@@ -271,7 +271,7 @@
               <a:pPr lvl="0">
                 <a:defRPr/>
               </a:pPr>
-              <a:t>2026. 6. 19.</a:t>
+              <a:t>2026. 6. 21.</a:t>
             </a:fld>
             <a:endParaRPr lang="ko-KR" altLang="en-US"/>
           </a:p>
@@ -463,7 +463,7 @@
               <a:pPr lvl="0">
                 <a:defRPr/>
               </a:pPr>
-              <a:t>2026. 6. 19.</a:t>
+              <a:t>2026. 6. 21.</a:t>
             </a:fld>
             <a:endParaRPr lang="ko-KR" altLang="en-US"/>
           </a:p>
@@ -665,7 +665,7 @@
               <a:pPr lvl="0">
                 <a:defRPr/>
               </a:pPr>
-              <a:t>2026. 6. 19.</a:t>
+              <a:t>2026. 6. 21.</a:t>
             </a:fld>
             <a:endParaRPr lang="ko-KR" altLang="en-US"/>
           </a:p>
@@ -865,7 +865,7 @@
               <a:pPr lvl="0">
                 <a:defRPr/>
               </a:pPr>
-              <a:t>2026. 6. 19.</a:t>
+              <a:t>2026. 6. 21.</a:t>
             </a:fld>
             <a:endParaRPr lang="ko-KR" altLang="en-US"/>
           </a:p>
@@ -1126,7 +1126,7 @@
               <a:pPr lvl="0">
                 <a:defRPr/>
               </a:pPr>
-              <a:t>2026. 6. 19.</a:t>
+              <a:t>2026. 6. 21.</a:t>
             </a:fld>
             <a:endParaRPr lang="ko-KR" altLang="en-US"/>
           </a:p>
@@ -1389,7 +1389,7 @@
               <a:pPr lvl="0">
                 <a:defRPr/>
               </a:pPr>
-              <a:t>2026. 6. 19.</a:t>
+              <a:t>2026. 6. 21.</a:t>
             </a:fld>
             <a:endParaRPr lang="ko-KR" altLang="en-US"/>
           </a:p>
@@ -1791,7 +1791,7 @@
               <a:pPr lvl="0">
                 <a:defRPr/>
               </a:pPr>
-              <a:t>2026. 6. 19.</a:t>
+              <a:t>2026. 6. 21.</a:t>
             </a:fld>
             <a:endParaRPr lang="ko-KR" altLang="en-US"/>
           </a:p>
@@ -1922,7 +1922,7 @@
               <a:pPr lvl="0">
                 <a:defRPr/>
               </a:pPr>
-              <a:t>2026. 6. 19.</a:t>
+              <a:t>2026. 6. 21.</a:t>
             </a:fld>
             <a:endParaRPr lang="ko-KR" altLang="en-US"/>
           </a:p>
@@ -2028,7 +2028,7 @@
               <a:pPr lvl="0">
                 <a:defRPr/>
               </a:pPr>
-              <a:t>2026. 6. 19.</a:t>
+              <a:t>2026. 6. 21.</a:t>
             </a:fld>
             <a:endParaRPr lang="ko-KR" altLang="en-US"/>
           </a:p>
@@ -2329,7 +2329,7 @@
               <a:pPr lvl="0">
                 <a:defRPr/>
               </a:pPr>
-              <a:t>2026. 6. 19.</a:t>
+              <a:t>2026. 6. 21.</a:t>
             </a:fld>
             <a:endParaRPr lang="ko-KR" altLang="en-US"/>
           </a:p>
@@ -2600,7 +2600,7 @@
               <a:pPr lvl="0">
                 <a:defRPr/>
               </a:pPr>
-              <a:t>2026. 6. 19.</a:t>
+              <a:t>2026. 6. 21.</a:t>
             </a:fld>
             <a:endParaRPr lang="ko-KR" altLang="en-US"/>
           </a:p>
@@ -2838,7 +2838,7 @@
               <a:pPr lvl="0">
                 <a:defRPr/>
               </a:pPr>
-              <a:t>2026. 6. 19.</a:t>
+              <a:t>2026. 6. 21.</a:t>
             </a:fld>
             <a:endParaRPr lang="ko-KR" altLang="en-US"/>
           </a:p>
@@ -3300,40 +3300,6 @@
               <a:defRPr/>
             </a:pPr>
             <a:r>
-              <a:rPr kumimoji="0" lang="en-US" altLang="ko-KR" sz="9600" b="1" i="0" u="none" strike="noStrike" kern="1200" cap="none" spc="-300" normalizeH="0" baseline="0" noProof="0" dirty="0">
-                <a:ln w="9525">
-                  <a:solidFill>
-                    <a:prstClr val="black"/>
-                  </a:solidFill>
-                </a:ln>
-                <a:solidFill>
-                  <a:srgbClr val="FFFF00"/>
-                </a:solidFill>
-                <a:effectLst/>
-                <a:uLnTx/>
-                <a:uFillTx/>
-                <a:latin typeface="휴먼모음T" panose="02030504000101010101" pitchFamily="18" charset="-127"/>
-                <a:ea typeface="휴먼모음T" panose="02030504000101010101" pitchFamily="18" charset="-127"/>
-                <a:cs typeface="+mn-cs"/>
-              </a:rPr>
-              <a:t>4.</a:t>
-            </a:r>
-            <a:r>
-              <a:rPr lang="ko-KR" altLang="en-US" sz="9600" b="1" spc="-300" dirty="0">
-                <a:ln w="9525">
-                  <a:solidFill>
-                    <a:prstClr val="black"/>
-                  </a:solidFill>
-                </a:ln>
-                <a:solidFill>
-                  <a:srgbClr val="FFFF00"/>
-                </a:solidFill>
-                <a:latin typeface="휴먼모음T" panose="02030504000101010101" pitchFamily="18" charset="-127"/>
-                <a:ea typeface="휴먼모음T" panose="02030504000101010101" pitchFamily="18" charset="-127"/>
-              </a:rPr>
-              <a:t> </a:t>
-            </a:r>
-            <a:r>
               <a:rPr lang="ko-KR" altLang="en-US" sz="8000" b="1" spc="-300" dirty="0">
                 <a:ln w="9525">
                   <a:solidFill>
@@ -3348,37 +3314,6 @@
               </a:rPr>
               <a:t>나는 주를 섬기는 것에</a:t>
             </a:r>
-            <a:endParaRPr lang="en-US" altLang="ko-KR" sz="9600" b="1" spc="-300" dirty="0">
-              <a:ln w="9525">
-                <a:solidFill>
-                  <a:prstClr val="black"/>
-                </a:solidFill>
-              </a:ln>
-              <a:solidFill>
-                <a:srgbClr val="FFFF00"/>
-              </a:solidFill>
-              <a:latin typeface="휴먼모음T" panose="02030504000101010101" pitchFamily="18" charset="-127"/>
-              <a:ea typeface="휴먼모음T" panose="02030504000101010101" pitchFamily="18" charset="-127"/>
-            </a:endParaRPr>
-          </a:p>
-          <a:p>
-            <a:pPr marL="0" marR="0" lvl="0" indent="0" algn="ctr" defTabSz="914400" rtl="0" eaLnBrk="1" fontAlgn="auto" latinLnBrk="1" hangingPunct="1">
-              <a:lnSpc>
-                <a:spcPct val="100000"/>
-              </a:lnSpc>
-              <a:spcBef>
-                <a:spcPts val="0"/>
-              </a:spcBef>
-              <a:spcAft>
-                <a:spcPts val="0"/>
-              </a:spcAft>
-              <a:buClrTx/>
-              <a:buSzTx/>
-              <a:buFontTx/>
-              <a:buNone/>
-              <a:tabLst/>
-              <a:defRPr/>
-            </a:pPr>
             <a:r>
               <a:rPr lang="en-US" altLang="ko-KR" sz="8000" b="1" spc="-300" dirty="0">
                 <a:ln w="9525">
@@ -3393,21 +3328,6 @@
                 <a:ea typeface="휴먼모음T" panose="02030504000101010101" pitchFamily="18" charset="-127"/>
               </a:rPr>
               <a:t>+</a:t>
-            </a:r>
-            <a:r>
-              <a:rPr lang="en-US" altLang="ko-KR" sz="9600" b="1" spc="-300" dirty="0">
-                <a:ln w="9525">
-                  <a:solidFill>
-                    <a:prstClr val="black"/>
-                  </a:solidFill>
-                </a:ln>
-                <a:solidFill>
-                  <a:srgbClr val="FFFF00"/>
-                </a:solidFill>
-                <a:latin typeface="휴먼모음T" panose="02030504000101010101" pitchFamily="18" charset="-127"/>
-                <a:ea typeface="휴먼모음T" panose="02030504000101010101" pitchFamily="18" charset="-127"/>
-              </a:rPr>
-              <a:t> </a:t>
             </a:r>
             <a:r>
               <a:rPr lang="ko-KR" altLang="en-US" sz="8000" b="1" spc="-300" dirty="0">
@@ -3545,7 +3465,7 @@
                 <a:latin typeface="휴먼모음T" panose="02030504000101010101" pitchFamily="18" charset="-127"/>
                 <a:ea typeface="휴먼모음T" panose="02030504000101010101" pitchFamily="18" charset="-127"/>
               </a:rPr>
-              <a:t>A1</a:t>
+              <a:t>A1a</a:t>
             </a:r>
             <a:r>
               <a:rPr lang="ko-KR" altLang="en-US" sz="7200" b="1" spc="-300" dirty="0">
@@ -3817,7 +3737,7 @@
                 <a:latin typeface="휴먼모음T" panose="02030504000101010101" pitchFamily="18" charset="-127"/>
                 <a:ea typeface="휴먼모음T" panose="02030504000101010101" pitchFamily="18" charset="-127"/>
               </a:rPr>
-              <a:t>A1</a:t>
+              <a:t>A1b</a:t>
             </a:r>
             <a:r>
               <a:rPr lang="ko-KR" altLang="en-US" sz="7200" b="1" spc="-300" dirty="0">
@@ -4089,7 +4009,7 @@
                 <a:latin typeface="휴먼모음T" panose="02030504000101010101" pitchFamily="18" charset="-127"/>
                 <a:ea typeface="휴먼모음T" panose="02030504000101010101" pitchFamily="18" charset="-127"/>
               </a:rPr>
-              <a:t>A2</a:t>
+              <a:t>A2a</a:t>
             </a:r>
             <a:r>
               <a:rPr lang="ko-KR" altLang="en-US" sz="7200" b="1" spc="-300" dirty="0">
@@ -4361,7 +4281,7 @@
                 <a:latin typeface="휴먼모음T" panose="02030504000101010101" pitchFamily="18" charset="-127"/>
                 <a:ea typeface="휴먼모음T" panose="02030504000101010101" pitchFamily="18" charset="-127"/>
               </a:rPr>
-              <a:t>A2</a:t>
+              <a:t>A2b</a:t>
             </a:r>
             <a:r>
               <a:rPr lang="ko-KR" altLang="en-US" sz="7200" b="1" spc="-300" dirty="0">
@@ -4648,7 +4568,7 @@
                 <a:latin typeface="휴먼모음T" panose="02030504000101010101" pitchFamily="18" charset="-127"/>
                 <a:ea typeface="휴먼모음T" panose="02030504000101010101" pitchFamily="18" charset="-127"/>
               </a:rPr>
-              <a:t>B</a:t>
+              <a:t>Ba</a:t>
             </a:r>
             <a:r>
               <a:rPr lang="ko-KR" altLang="en-US" sz="7200" b="1" spc="-300" dirty="0">
@@ -4935,7 +4855,7 @@
                 <a:latin typeface="휴먼모음T" panose="02030504000101010101" pitchFamily="18" charset="-127"/>
                 <a:ea typeface="휴먼모음T" panose="02030504000101010101" pitchFamily="18" charset="-127"/>
               </a:rPr>
-              <a:t>B</a:t>
+              <a:t>Bb</a:t>
             </a:r>
             <a:r>
               <a:rPr lang="ko-KR" altLang="en-US" sz="7200" b="1" spc="-300" dirty="0">
